--- a/Sentence Served Folder/Progress Presentation.pptx
+++ b/Sentence Served Folder/Progress Presentation.pptx
@@ -7,16 +7,17 @@
   <p:sldIdLst>
     <p:sldId id="256" r:id="rId2"/>
     <p:sldId id="257" r:id="rId3"/>
-    <p:sldId id="258" r:id="rId4"/>
-    <p:sldId id="259" r:id="rId5"/>
-    <p:sldId id="260" r:id="rId6"/>
-    <p:sldId id="261" r:id="rId7"/>
-    <p:sldId id="262" r:id="rId8"/>
-    <p:sldId id="263" r:id="rId9"/>
-    <p:sldId id="264" r:id="rId10"/>
-    <p:sldId id="265" r:id="rId11"/>
-    <p:sldId id="266" r:id="rId12"/>
-    <p:sldId id="267" r:id="rId13"/>
+    <p:sldId id="268" r:id="rId4"/>
+    <p:sldId id="258" r:id="rId5"/>
+    <p:sldId id="259" r:id="rId6"/>
+    <p:sldId id="260" r:id="rId7"/>
+    <p:sldId id="261" r:id="rId8"/>
+    <p:sldId id="262" r:id="rId9"/>
+    <p:sldId id="263" r:id="rId10"/>
+    <p:sldId id="264" r:id="rId11"/>
+    <p:sldId id="265" r:id="rId12"/>
+    <p:sldId id="266" r:id="rId13"/>
+    <p:sldId id="267" r:id="rId14"/>
   </p:sldIdLst>
   <p:sldSz cx="12192000" cy="6858000"/>
   <p:notesSz cx="6858000" cy="9144000"/>
@@ -115,6 +116,11 @@
       </a:defRPr>
     </a:lvl9pPr>
   </p:defaultTextStyle>
+  <p:extLst>
+    <p:ext uri="{EFAFB233-063F-42B5-8137-9DF3F51BA10A}">
+      <p15:sldGuideLst xmlns:p15="http://schemas.microsoft.com/office/powerpoint/2012/main"/>
+    </p:ext>
+  </p:extLst>
 </p:presentation>
 </file>
 
@@ -3439,6 +3445,36 @@
           <a:chExt cx="0" cy="0"/>
         </a:xfrm>
       </p:grpSpPr>
+    </p:spTree>
+    <p:extLst>
+      <p:ext uri="{BB962C8B-B14F-4D97-AF65-F5344CB8AC3E}">
+        <p14:creationId xmlns:p14="http://schemas.microsoft.com/office/powerpoint/2010/main" val="3386730230"/>
+      </p:ext>
+    </p:extLst>
+  </p:cSld>
+  <p:clrMapOvr>
+    <a:masterClrMapping/>
+  </p:clrMapOvr>
+</p:sld>
+</file>
+
+<file path=ppt/slides/slide11.xml><?xml version="1.0" encoding="utf-8"?>
+<p:sld xmlns:a="http://schemas.openxmlformats.org/drawingml/2006/main" xmlns:r="http://schemas.openxmlformats.org/officeDocument/2006/relationships" xmlns:p="http://schemas.openxmlformats.org/presentationml/2006/main">
+  <p:cSld>
+    <p:spTree>
+      <p:nvGrpSpPr>
+        <p:cNvPr id="1" name=""/>
+        <p:cNvGrpSpPr/>
+        <p:nvPr/>
+      </p:nvGrpSpPr>
+      <p:grpSpPr>
+        <a:xfrm>
+          <a:off x="0" y="0"/>
+          <a:ext cx="0" cy="0"/>
+          <a:chOff x="0" y="0"/>
+          <a:chExt cx="0" cy="0"/>
+        </a:xfrm>
+      </p:grpSpPr>
       <p:sp>
         <p:nvSpPr>
           <p:cNvPr id="2" name="Title 1">
@@ -3480,7 +3516,7 @@
 </p:sld>
 </file>
 
-<file path=ppt/slides/slide11.xml><?xml version="1.0" encoding="utf-8"?>
+<file path=ppt/slides/slide12.xml><?xml version="1.0" encoding="utf-8"?>
 <p:sld xmlns:a="http://schemas.openxmlformats.org/drawingml/2006/main" xmlns:r="http://schemas.openxmlformats.org/officeDocument/2006/relationships" xmlns:p="http://schemas.openxmlformats.org/presentationml/2006/main">
   <p:cSld>
     <p:spTree>
@@ -3510,7 +3546,7 @@
 </p:sld>
 </file>
 
-<file path=ppt/slides/slide12.xml><?xml version="1.0" encoding="utf-8"?>
+<file path=ppt/slides/slide13.xml><?xml version="1.0" encoding="utf-8"?>
 <p:sld xmlns:a="http://schemas.openxmlformats.org/drawingml/2006/main" xmlns:r="http://schemas.openxmlformats.org/officeDocument/2006/relationships" xmlns:p="http://schemas.openxmlformats.org/presentationml/2006/main">
   <p:cSld>
     <p:spTree>
@@ -3580,8 +3616,87 @@
           <a:p>
             <a:r>
               <a:rPr lang="en-GB" dirty="0"/>
-              <a:t>What is my game and what has changed?</a:t>
-            </a:r>
+              <a:t>What is my game?</a:t>
+            </a:r>
+          </a:p>
+        </p:txBody>
+      </p:sp>
+      <p:sp>
+        <p:nvSpPr>
+          <p:cNvPr id="3" name="TextBox 2">
+            <a:extLst>
+              <a:ext uri="{FF2B5EF4-FFF2-40B4-BE49-F238E27FC236}">
+                <a16:creationId xmlns:a16="http://schemas.microsoft.com/office/drawing/2014/main" id="{76BF7E47-6B8A-CAF3-6B23-5427E51EE5BC}"/>
+              </a:ext>
+            </a:extLst>
+          </p:cNvPr>
+          <p:cNvSpPr txBox="1"/>
+          <p:nvPr/>
+        </p:nvSpPr>
+        <p:spPr>
+          <a:xfrm>
+            <a:off x="501445" y="1907458"/>
+            <a:ext cx="11326761" cy="3046988"/>
+          </a:xfrm>
+          <a:prstGeom prst="rect">
+            <a:avLst/>
+          </a:prstGeom>
+          <a:noFill/>
+        </p:spPr>
+        <p:txBody>
+          <a:bodyPr wrap="square" rtlCol="0">
+            <a:spAutoFit/>
+          </a:bodyPr>
+          <a:lstStyle/>
+          <a:p>
+            <a:pPr marL="285750" indent="-285750">
+              <a:buFont typeface="Arial" panose="020B0604020202020204" pitchFamily="34" charset="0"/>
+              <a:buChar char="•"/>
+            </a:pPr>
+            <a:r>
+              <a:rPr lang="en-US" sz="2400" dirty="0"/>
+              <a:t>Detective Game where the goal is to investigate murders and arrest the person responsible</a:t>
+            </a:r>
+          </a:p>
+          <a:p>
+            <a:endParaRPr lang="en-US" sz="2400" dirty="0"/>
+          </a:p>
+          <a:p>
+            <a:pPr marL="285750" indent="-285750">
+              <a:buFont typeface="Arial" panose="020B0604020202020204" pitchFamily="34" charset="0"/>
+              <a:buChar char="•"/>
+            </a:pPr>
+            <a:r>
+              <a:rPr lang="en-US" sz="2400" dirty="0"/>
+              <a:t>Use a high-tech scanner to determine the cause of death and find relevant clues</a:t>
+            </a:r>
+          </a:p>
+          <a:p>
+            <a:endParaRPr lang="en-US" sz="2400" dirty="0"/>
+          </a:p>
+          <a:p>
+            <a:pPr marL="285750" indent="-285750">
+              <a:buFont typeface="Arial" panose="020B0604020202020204" pitchFamily="34" charset="0"/>
+              <a:buChar char="•"/>
+            </a:pPr>
+            <a:r>
+              <a:rPr lang="en-US" sz="2400" dirty="0"/>
+              <a:t>Take your findings to your office to narrow the workload</a:t>
+            </a:r>
+          </a:p>
+          <a:p>
+            <a:endParaRPr lang="en-US" sz="2400" dirty="0"/>
+          </a:p>
+          <a:p>
+            <a:pPr marL="285750" indent="-285750">
+              <a:buFont typeface="Arial" panose="020B0604020202020204" pitchFamily="34" charset="0"/>
+              <a:buChar char="•"/>
+            </a:pPr>
+            <a:r>
+              <a:rPr lang="en-US" sz="2400" dirty="0"/>
+              <a:t>Interrogate suspects and using the gathered evidence arrest them.</a:t>
+            </a:r>
+            <a:endParaRPr lang="en-GB" sz="2400" dirty="0"/>
           </a:p>
         </p:txBody>
       </p:sp>
@@ -3603,6 +3718,132 @@
   <p:cSld>
     <p:spTree>
       <p:nvGrpSpPr>
+        <p:cNvPr id="1" name="">
+          <a:extLst>
+            <a:ext uri="{FF2B5EF4-FFF2-40B4-BE49-F238E27FC236}">
+              <a16:creationId xmlns:a16="http://schemas.microsoft.com/office/drawing/2014/main" id="{D68A5E15-E74D-170E-24D8-59A100181001}"/>
+            </a:ext>
+          </a:extLst>
+        </p:cNvPr>
+        <p:cNvGrpSpPr/>
+        <p:nvPr/>
+      </p:nvGrpSpPr>
+      <p:grpSpPr>
+        <a:xfrm>
+          <a:off x="0" y="0"/>
+          <a:ext cx="0" cy="0"/>
+          <a:chOff x="0" y="0"/>
+          <a:chExt cx="0" cy="0"/>
+        </a:xfrm>
+      </p:grpSpPr>
+      <p:sp>
+        <p:nvSpPr>
+          <p:cNvPr id="2" name="Title 1">
+            <a:extLst>
+              <a:ext uri="{FF2B5EF4-FFF2-40B4-BE49-F238E27FC236}">
+                <a16:creationId xmlns:a16="http://schemas.microsoft.com/office/drawing/2014/main" id="{1CE02501-F0E1-0262-7404-714BBBE589E1}"/>
+              </a:ext>
+            </a:extLst>
+          </p:cNvPr>
+          <p:cNvSpPr>
+            <a:spLocks noGrp="1"/>
+          </p:cNvSpPr>
+          <p:nvPr>
+            <p:ph type="title"/>
+          </p:nvPr>
+        </p:nvSpPr>
+        <p:spPr/>
+        <p:txBody>
+          <a:bodyPr/>
+          <a:lstStyle/>
+          <a:p>
+            <a:r>
+              <a:rPr lang="en-GB" dirty="0"/>
+              <a:t>What has changed in my game?</a:t>
+            </a:r>
+          </a:p>
+        </p:txBody>
+      </p:sp>
+      <p:sp>
+        <p:nvSpPr>
+          <p:cNvPr id="3" name="TextBox 2">
+            <a:extLst>
+              <a:ext uri="{FF2B5EF4-FFF2-40B4-BE49-F238E27FC236}">
+                <a16:creationId xmlns:a16="http://schemas.microsoft.com/office/drawing/2014/main" id="{4A47B20B-0A61-14BE-52A7-BD175A4F7613}"/>
+              </a:ext>
+            </a:extLst>
+          </p:cNvPr>
+          <p:cNvSpPr txBox="1"/>
+          <p:nvPr/>
+        </p:nvSpPr>
+        <p:spPr>
+          <a:xfrm>
+            <a:off x="501445" y="1907458"/>
+            <a:ext cx="11326761" cy="1938992"/>
+          </a:xfrm>
+          <a:prstGeom prst="rect">
+            <a:avLst/>
+          </a:prstGeom>
+          <a:noFill/>
+        </p:spPr>
+        <p:txBody>
+          <a:bodyPr wrap="square" rtlCol="0">
+            <a:spAutoFit/>
+          </a:bodyPr>
+          <a:lstStyle/>
+          <a:p>
+            <a:pPr marL="285750" indent="-285750">
+              <a:buFont typeface="Arial" panose="020B0604020202020204" pitchFamily="34" charset="0"/>
+              <a:buChar char="•"/>
+            </a:pPr>
+            <a:r>
+              <a:rPr lang="en-US" sz="2400" dirty="0"/>
+              <a:t>The controller layout and relevant console</a:t>
+            </a:r>
+          </a:p>
+          <a:p>
+            <a:pPr marL="285750" indent="-285750">
+              <a:buFont typeface="Arial" panose="020B0604020202020204" pitchFamily="34" charset="0"/>
+              <a:buChar char="•"/>
+            </a:pPr>
+            <a:endParaRPr lang="en-US" sz="2400" dirty="0"/>
+          </a:p>
+          <a:p>
+            <a:endParaRPr lang="en-US" sz="2400" dirty="0"/>
+          </a:p>
+          <a:p>
+            <a:endParaRPr lang="en-US" sz="2400" dirty="0"/>
+          </a:p>
+          <a:p>
+            <a:pPr marL="285750" indent="-285750">
+              <a:buFont typeface="Arial" panose="020B0604020202020204" pitchFamily="34" charset="0"/>
+              <a:buChar char="•"/>
+            </a:pPr>
+            <a:r>
+              <a:rPr lang="en-US" sz="2400" dirty="0"/>
+              <a:t>How many potential clues there is going to be</a:t>
+            </a:r>
+          </a:p>
+        </p:txBody>
+      </p:sp>
+    </p:spTree>
+    <p:extLst>
+      <p:ext uri="{BB962C8B-B14F-4D97-AF65-F5344CB8AC3E}">
+        <p14:creationId xmlns:p14="http://schemas.microsoft.com/office/powerpoint/2010/main" val="4202669708"/>
+      </p:ext>
+    </p:extLst>
+  </p:cSld>
+  <p:clrMapOvr>
+    <a:masterClrMapping/>
+  </p:clrMapOvr>
+</p:sld>
+</file>
+
+<file path=ppt/slides/slide4.xml><?xml version="1.0" encoding="utf-8"?>
+<p:sld xmlns:a="http://schemas.openxmlformats.org/drawingml/2006/main" xmlns:r="http://schemas.openxmlformats.org/officeDocument/2006/relationships" xmlns:p="http://schemas.openxmlformats.org/presentationml/2006/main">
+  <p:cSld>
+    <p:spTree>
+      <p:nvGrpSpPr>
         <p:cNvPr id="1" name=""/>
         <p:cNvGrpSpPr/>
         <p:nvPr/>
@@ -3640,6 +3881,100 @@
               <a:rPr lang="en-GB" dirty="0"/>
               <a:t>Development Progress</a:t>
             </a:r>
+          </a:p>
+        </p:txBody>
+      </p:sp>
+      <p:sp>
+        <p:nvSpPr>
+          <p:cNvPr id="3" name="TextBox 2">
+            <a:extLst>
+              <a:ext uri="{FF2B5EF4-FFF2-40B4-BE49-F238E27FC236}">
+                <a16:creationId xmlns:a16="http://schemas.microsoft.com/office/drawing/2014/main" id="{1CA08647-8C09-8391-BC4C-F1453EFD2079}"/>
+              </a:ext>
+            </a:extLst>
+          </p:cNvPr>
+          <p:cNvSpPr txBox="1"/>
+          <p:nvPr/>
+        </p:nvSpPr>
+        <p:spPr>
+          <a:xfrm>
+            <a:off x="462116" y="1897625"/>
+            <a:ext cx="11248103" cy="3416320"/>
+          </a:xfrm>
+          <a:prstGeom prst="rect">
+            <a:avLst/>
+          </a:prstGeom>
+          <a:noFill/>
+        </p:spPr>
+        <p:txBody>
+          <a:bodyPr wrap="square" rtlCol="0">
+            <a:spAutoFit/>
+          </a:bodyPr>
+          <a:lstStyle/>
+          <a:p>
+            <a:pPr marL="342900" indent="-342900">
+              <a:buFont typeface="Arial" panose="020B0604020202020204" pitchFamily="34" charset="0"/>
+              <a:buChar char="•"/>
+            </a:pPr>
+            <a:r>
+              <a:rPr lang="en-US" sz="2400" dirty="0"/>
+              <a:t>The Mechanics I have so far</a:t>
+            </a:r>
+          </a:p>
+          <a:p>
+            <a:pPr marL="342900" indent="-342900">
+              <a:buFont typeface="Arial" panose="020B0604020202020204" pitchFamily="34" charset="0"/>
+              <a:buChar char="•"/>
+            </a:pPr>
+            <a:endParaRPr lang="en-US" sz="2400" dirty="0"/>
+          </a:p>
+          <a:p>
+            <a:pPr marL="342900" indent="-342900">
+              <a:buFont typeface="Arial" panose="020B0604020202020204" pitchFamily="34" charset="0"/>
+              <a:buChar char="•"/>
+            </a:pPr>
+            <a:endParaRPr lang="en-US" sz="2400" dirty="0"/>
+          </a:p>
+          <a:p>
+            <a:endParaRPr lang="en-US" sz="2400" dirty="0"/>
+          </a:p>
+          <a:p>
+            <a:pPr marL="342900" indent="-342900">
+              <a:buFont typeface="Arial" panose="020B0604020202020204" pitchFamily="34" charset="0"/>
+              <a:buChar char="•"/>
+            </a:pPr>
+            <a:r>
+              <a:rPr lang="en-US" sz="2400" dirty="0"/>
+              <a:t>Animations</a:t>
+            </a:r>
+          </a:p>
+          <a:p>
+            <a:pPr marL="342900" indent="-342900">
+              <a:buFont typeface="Arial" panose="020B0604020202020204" pitchFamily="34" charset="0"/>
+              <a:buChar char="•"/>
+            </a:pPr>
+            <a:endParaRPr lang="en-US" sz="2400" dirty="0"/>
+          </a:p>
+          <a:p>
+            <a:pPr marL="342900" indent="-342900">
+              <a:buFont typeface="Arial" panose="020B0604020202020204" pitchFamily="34" charset="0"/>
+              <a:buChar char="•"/>
+            </a:pPr>
+            <a:endParaRPr lang="en-US" sz="2400" dirty="0"/>
+          </a:p>
+          <a:p>
+            <a:endParaRPr lang="en-US" sz="2400" dirty="0"/>
+          </a:p>
+          <a:p>
+            <a:pPr marL="342900" indent="-342900">
+              <a:buFont typeface="Arial" panose="020B0604020202020204" pitchFamily="34" charset="0"/>
+              <a:buChar char="•"/>
+            </a:pPr>
+            <a:r>
+              <a:rPr lang="en-US" sz="2400" dirty="0"/>
+              <a:t>What has slowed me down</a:t>
+            </a:r>
+            <a:endParaRPr lang="en-GB" sz="2400" dirty="0"/>
           </a:p>
         </p:txBody>
       </p:sp>
@@ -3656,7 +3991,7 @@
 </p:sld>
 </file>
 
-<file path=ppt/slides/slide4.xml><?xml version="1.0" encoding="utf-8"?>
+<file path=ppt/slides/slide5.xml><?xml version="1.0" encoding="utf-8"?>
 <p:sld xmlns:a="http://schemas.openxmlformats.org/drawingml/2006/main" xmlns:r="http://schemas.openxmlformats.org/officeDocument/2006/relationships" xmlns:p="http://schemas.openxmlformats.org/presentationml/2006/main">
   <p:cSld>
     <p:spTree>
@@ -3686,7 +4021,7 @@
 </p:sld>
 </file>
 
-<file path=ppt/slides/slide5.xml><?xml version="1.0" encoding="utf-8"?>
+<file path=ppt/slides/slide6.xml><?xml version="1.0" encoding="utf-8"?>
 <p:sld xmlns:a="http://schemas.openxmlformats.org/drawingml/2006/main" xmlns:r="http://schemas.openxmlformats.org/officeDocument/2006/relationships" xmlns:p="http://schemas.openxmlformats.org/presentationml/2006/main">
   <p:cSld>
     <p:spTree>
@@ -3716,64 +4051,6 @@
 </p:sld>
 </file>
 
-<file path=ppt/slides/slide6.xml><?xml version="1.0" encoding="utf-8"?>
-<p:sld xmlns:a="http://schemas.openxmlformats.org/drawingml/2006/main" xmlns:r="http://schemas.openxmlformats.org/officeDocument/2006/relationships" xmlns:p="http://schemas.openxmlformats.org/presentationml/2006/main">
-  <p:cSld>
-    <p:spTree>
-      <p:nvGrpSpPr>
-        <p:cNvPr id="1" name=""/>
-        <p:cNvGrpSpPr/>
-        <p:nvPr/>
-      </p:nvGrpSpPr>
-      <p:grpSpPr>
-        <a:xfrm>
-          <a:off x="0" y="0"/>
-          <a:ext cx="0" cy="0"/>
-          <a:chOff x="0" y="0"/>
-          <a:chExt cx="0" cy="0"/>
-        </a:xfrm>
-      </p:grpSpPr>
-      <p:sp>
-        <p:nvSpPr>
-          <p:cNvPr id="2" name="Title 1">
-            <a:extLst>
-              <a:ext uri="{FF2B5EF4-FFF2-40B4-BE49-F238E27FC236}">
-                <a16:creationId xmlns:a16="http://schemas.microsoft.com/office/drawing/2014/main" id="{DD4F5DDA-33B4-F93F-1B30-9E0FD04CADD3}"/>
-              </a:ext>
-            </a:extLst>
-          </p:cNvPr>
-          <p:cNvSpPr>
-            <a:spLocks noGrp="1"/>
-          </p:cNvSpPr>
-          <p:nvPr>
-            <p:ph type="title"/>
-          </p:nvPr>
-        </p:nvSpPr>
-        <p:spPr/>
-        <p:txBody>
-          <a:bodyPr/>
-          <a:lstStyle/>
-          <a:p>
-            <a:r>
-              <a:rPr lang="en-GB" dirty="0"/>
-              <a:t>Development reflection</a:t>
-            </a:r>
-          </a:p>
-        </p:txBody>
-      </p:sp>
-    </p:spTree>
-    <p:extLst>
-      <p:ext uri="{BB962C8B-B14F-4D97-AF65-F5344CB8AC3E}">
-        <p14:creationId xmlns:p14="http://schemas.microsoft.com/office/powerpoint/2010/main" val="110005420"/>
-      </p:ext>
-    </p:extLst>
-  </p:cSld>
-  <p:clrMapOvr>
-    <a:masterClrMapping/>
-  </p:clrMapOvr>
-</p:sld>
-</file>
-
 <file path=ppt/slides/slide7.xml><?xml version="1.0" encoding="utf-8"?>
 <p:sld xmlns:a="http://schemas.openxmlformats.org/drawingml/2006/main" xmlns:r="http://schemas.openxmlformats.org/officeDocument/2006/relationships" xmlns:p="http://schemas.openxmlformats.org/presentationml/2006/main">
   <p:cSld>
@@ -3796,7 +4073,7 @@
           <p:cNvPr id="2" name="Title 1">
             <a:extLst>
               <a:ext uri="{FF2B5EF4-FFF2-40B4-BE49-F238E27FC236}">
-                <a16:creationId xmlns:a16="http://schemas.microsoft.com/office/drawing/2014/main" id="{E1E280DB-8B2A-12FB-EC2A-34A50E29AB95}"/>
+                <a16:creationId xmlns:a16="http://schemas.microsoft.com/office/drawing/2014/main" id="{DD4F5DDA-33B4-F93F-1B30-9E0FD04CADD3}"/>
               </a:ext>
             </a:extLst>
           </p:cNvPr>
@@ -3814,15 +4091,110 @@
           <a:p>
             <a:r>
               <a:rPr lang="en-GB" dirty="0"/>
-              <a:t>Development forward planning</a:t>
-            </a:r>
+              <a:t>Development reflection</a:t>
+            </a:r>
+          </a:p>
+        </p:txBody>
+      </p:sp>
+      <p:sp>
+        <p:nvSpPr>
+          <p:cNvPr id="3" name="TextBox 2">
+            <a:extLst>
+              <a:ext uri="{FF2B5EF4-FFF2-40B4-BE49-F238E27FC236}">
+                <a16:creationId xmlns:a16="http://schemas.microsoft.com/office/drawing/2014/main" id="{D7E5C000-C8E1-46FD-C478-FCCB2972353B}"/>
+              </a:ext>
+            </a:extLst>
+          </p:cNvPr>
+          <p:cNvSpPr txBox="1"/>
+          <p:nvPr/>
+        </p:nvSpPr>
+        <p:spPr>
+          <a:xfrm>
+            <a:off x="334297" y="1838632"/>
+            <a:ext cx="11307097" cy="3046988"/>
+          </a:xfrm>
+          <a:prstGeom prst="rect">
+            <a:avLst/>
+          </a:prstGeom>
+          <a:noFill/>
+        </p:spPr>
+        <p:txBody>
+          <a:bodyPr wrap="square" rtlCol="0">
+            <a:spAutoFit/>
+          </a:bodyPr>
+          <a:lstStyle/>
+          <a:p>
+            <a:pPr marL="285750" indent="-285750">
+              <a:buFont typeface="Arial" panose="020B0604020202020204" pitchFamily="34" charset="0"/>
+              <a:buChar char="•"/>
+            </a:pPr>
+            <a:r>
+              <a:rPr lang="en-US" sz="2400" dirty="0"/>
+              <a:t>What am I happy with?</a:t>
+            </a:r>
+          </a:p>
+          <a:p>
+            <a:pPr marL="285750" indent="-285750">
+              <a:buFont typeface="Arial" panose="020B0604020202020204" pitchFamily="34" charset="0"/>
+              <a:buChar char="•"/>
+            </a:pPr>
+            <a:endParaRPr lang="en-US" sz="2400" dirty="0"/>
+          </a:p>
+          <a:p>
+            <a:pPr marL="285750" indent="-285750">
+              <a:buFont typeface="Arial" panose="020B0604020202020204" pitchFamily="34" charset="0"/>
+              <a:buChar char="•"/>
+            </a:pPr>
+            <a:endParaRPr lang="en-US" sz="2400" dirty="0"/>
+          </a:p>
+          <a:p>
+            <a:pPr marL="285750" indent="-285750">
+              <a:buFont typeface="Arial" panose="020B0604020202020204" pitchFamily="34" charset="0"/>
+              <a:buChar char="•"/>
+            </a:pPr>
+            <a:r>
+              <a:rPr lang="en-US" sz="2400" dirty="0"/>
+              <a:t>What is working?</a:t>
+            </a:r>
+          </a:p>
+          <a:p>
+            <a:pPr marL="285750" indent="-285750">
+              <a:buFont typeface="Arial" panose="020B0604020202020204" pitchFamily="34" charset="0"/>
+              <a:buChar char="•"/>
+            </a:pPr>
+            <a:endParaRPr lang="en-US" sz="2400" dirty="0"/>
+          </a:p>
+          <a:p>
+            <a:pPr marL="285750" indent="-285750">
+              <a:buFont typeface="Arial" panose="020B0604020202020204" pitchFamily="34" charset="0"/>
+              <a:buChar char="•"/>
+            </a:pPr>
+            <a:endParaRPr lang="en-US" sz="2400" dirty="0"/>
+          </a:p>
+          <a:p>
+            <a:pPr marL="285750" indent="-285750">
+              <a:buFont typeface="Arial" panose="020B0604020202020204" pitchFamily="34" charset="0"/>
+              <a:buChar char="•"/>
+            </a:pPr>
+            <a:endParaRPr lang="en-US" sz="2400" dirty="0"/>
+          </a:p>
+          <a:p>
+            <a:pPr marL="285750" indent="-285750">
+              <a:buFont typeface="Arial" panose="020B0604020202020204" pitchFamily="34" charset="0"/>
+              <a:buChar char="•"/>
+            </a:pPr>
+            <a:r>
+              <a:rPr lang="en-US" sz="2400" dirty="0"/>
+              <a:t>How can I make the development better?</a:t>
+            </a:r>
+            <a:endParaRPr lang="en-GB" sz="2400" dirty="0"/>
           </a:p>
         </p:txBody>
       </p:sp>
     </p:spTree>
     <p:extLst>
       <p:ext uri="{BB962C8B-B14F-4D97-AF65-F5344CB8AC3E}">
-        <p14:creationId xmlns:p14="http://schemas.microsoft.com/office/powerpoint/2010/main" val="2073747546"/>
+        <p14:creationId xmlns:p14="http://schemas.microsoft.com/office/powerpoint/2010/main" val="110005420"/>
       </p:ext>
     </p:extLst>
   </p:cSld>
@@ -3849,10 +4221,115 @@
           <a:chExt cx="0" cy="0"/>
         </a:xfrm>
       </p:grpSpPr>
+      <p:sp>
+        <p:nvSpPr>
+          <p:cNvPr id="2" name="Title 1">
+            <a:extLst>
+              <a:ext uri="{FF2B5EF4-FFF2-40B4-BE49-F238E27FC236}">
+                <a16:creationId xmlns:a16="http://schemas.microsoft.com/office/drawing/2014/main" id="{E1E280DB-8B2A-12FB-EC2A-34A50E29AB95}"/>
+              </a:ext>
+            </a:extLst>
+          </p:cNvPr>
+          <p:cNvSpPr>
+            <a:spLocks noGrp="1"/>
+          </p:cNvSpPr>
+          <p:nvPr>
+            <p:ph type="title"/>
+          </p:nvPr>
+        </p:nvSpPr>
+        <p:spPr/>
+        <p:txBody>
+          <a:bodyPr/>
+          <a:lstStyle/>
+          <a:p>
+            <a:r>
+              <a:rPr lang="en-GB" dirty="0"/>
+              <a:t>Development forward planning</a:t>
+            </a:r>
+          </a:p>
+        </p:txBody>
+      </p:sp>
+      <p:sp>
+        <p:nvSpPr>
+          <p:cNvPr id="3" name="TextBox 2">
+            <a:extLst>
+              <a:ext uri="{FF2B5EF4-FFF2-40B4-BE49-F238E27FC236}">
+                <a16:creationId xmlns:a16="http://schemas.microsoft.com/office/drawing/2014/main" id="{08D0287C-F6AB-D361-B894-928B95D49A6D}"/>
+              </a:ext>
+            </a:extLst>
+          </p:cNvPr>
+          <p:cNvSpPr txBox="1"/>
+          <p:nvPr/>
+        </p:nvSpPr>
+        <p:spPr>
+          <a:xfrm>
+            <a:off x="501445" y="1917289"/>
+            <a:ext cx="11061290" cy="2308324"/>
+          </a:xfrm>
+          <a:prstGeom prst="rect">
+            <a:avLst/>
+          </a:prstGeom>
+          <a:noFill/>
+        </p:spPr>
+        <p:txBody>
+          <a:bodyPr wrap="square" rtlCol="0">
+            <a:spAutoFit/>
+          </a:bodyPr>
+          <a:lstStyle/>
+          <a:p>
+            <a:pPr marL="342900" indent="-342900">
+              <a:buFont typeface="Arial" panose="020B0604020202020204" pitchFamily="34" charset="0"/>
+              <a:buChar char="•"/>
+            </a:pPr>
+            <a:r>
+              <a:rPr lang="en-GB" sz="2400" dirty="0"/>
+              <a:t>Have I met my goals?</a:t>
+            </a:r>
+          </a:p>
+          <a:p>
+            <a:pPr marL="342900" indent="-342900">
+              <a:buFont typeface="Arial" panose="020B0604020202020204" pitchFamily="34" charset="0"/>
+              <a:buChar char="•"/>
+            </a:pPr>
+            <a:endParaRPr lang="en-GB" sz="2400" dirty="0"/>
+          </a:p>
+          <a:p>
+            <a:pPr marL="342900" indent="-342900">
+              <a:buFont typeface="Arial" panose="020B0604020202020204" pitchFamily="34" charset="0"/>
+              <a:buChar char="•"/>
+            </a:pPr>
+            <a:endParaRPr lang="en-GB" sz="2400" dirty="0"/>
+          </a:p>
+          <a:p>
+            <a:pPr marL="342900" indent="-342900">
+              <a:buFont typeface="Arial" panose="020B0604020202020204" pitchFamily="34" charset="0"/>
+              <a:buChar char="•"/>
+            </a:pPr>
+            <a:endParaRPr lang="en-GB" sz="2400" dirty="0"/>
+          </a:p>
+          <a:p>
+            <a:pPr marL="342900" indent="-342900">
+              <a:buFont typeface="Arial" panose="020B0604020202020204" pitchFamily="34" charset="0"/>
+              <a:buChar char="•"/>
+            </a:pPr>
+            <a:endParaRPr lang="en-GB" sz="2400" dirty="0"/>
+          </a:p>
+          <a:p>
+            <a:pPr marL="342900" indent="-342900">
+              <a:buFont typeface="Arial" panose="020B0604020202020204" pitchFamily="34" charset="0"/>
+              <a:buChar char="•"/>
+            </a:pPr>
+            <a:r>
+              <a:rPr lang="en-GB" sz="2400" dirty="0"/>
+              <a:t>What goals are left?</a:t>
+            </a:r>
+          </a:p>
+        </p:txBody>
+      </p:sp>
     </p:spTree>
     <p:extLst>
       <p:ext uri="{BB962C8B-B14F-4D97-AF65-F5344CB8AC3E}">
-        <p14:creationId xmlns:p14="http://schemas.microsoft.com/office/powerpoint/2010/main" val="1320514543"/>
+        <p14:creationId xmlns:p14="http://schemas.microsoft.com/office/powerpoint/2010/main" val="2073747546"/>
       </p:ext>
     </p:extLst>
   </p:cSld>
@@ -3882,7 +4359,7 @@
     </p:spTree>
     <p:extLst>
       <p:ext uri="{BB962C8B-B14F-4D97-AF65-F5344CB8AC3E}">
-        <p14:creationId xmlns:p14="http://schemas.microsoft.com/office/powerpoint/2010/main" val="3386730230"/>
+        <p14:creationId xmlns:p14="http://schemas.microsoft.com/office/powerpoint/2010/main" val="1320514543"/>
       </p:ext>
     </p:extLst>
   </p:cSld>
